--- a/files/Intro Linux Commandline and Nanopore Microbial Genomics Course.pptx
+++ b/files/Intro Linux Commandline and Nanopore Microbial Genomics Course.pptx
@@ -17,20 +17,20 @@
     <p:sldId id="298" r:id="rId11"/>
     <p:sldId id="299" r:id="rId12"/>
     <p:sldId id="301" r:id="rId13"/>
-    <p:sldId id="263" r:id="rId14"/>
-    <p:sldId id="303" r:id="rId15"/>
-    <p:sldId id="264" r:id="rId16"/>
-    <p:sldId id="265" r:id="rId17"/>
-    <p:sldId id="266" r:id="rId18"/>
-    <p:sldId id="267" r:id="rId19"/>
-    <p:sldId id="272" r:id="rId20"/>
-    <p:sldId id="269" r:id="rId21"/>
-    <p:sldId id="268" r:id="rId22"/>
-    <p:sldId id="270" r:id="rId23"/>
-    <p:sldId id="271" r:id="rId24"/>
-    <p:sldId id="302" r:id="rId25"/>
-    <p:sldId id="273" r:id="rId26"/>
-    <p:sldId id="261" r:id="rId27"/>
+    <p:sldId id="261" r:id="rId14"/>
+    <p:sldId id="263" r:id="rId15"/>
+    <p:sldId id="303" r:id="rId16"/>
+    <p:sldId id="264" r:id="rId17"/>
+    <p:sldId id="265" r:id="rId18"/>
+    <p:sldId id="266" r:id="rId19"/>
+    <p:sldId id="267" r:id="rId20"/>
+    <p:sldId id="272" r:id="rId21"/>
+    <p:sldId id="269" r:id="rId22"/>
+    <p:sldId id="268" r:id="rId23"/>
+    <p:sldId id="270" r:id="rId24"/>
+    <p:sldId id="271" r:id="rId25"/>
+    <p:sldId id="302" r:id="rId26"/>
+    <p:sldId id="273" r:id="rId27"/>
     <p:sldId id="262" r:id="rId28"/>
   </p:sldIdLst>
   <p:sldSz cx="12192000" cy="6858000"/>
@@ -287,7 +287,7 @@
           <a:p>
             <a:fld id="{FF881B2C-DF78-4307-9E03-918864251AC5}" type="datetimeFigureOut">
               <a:rPr lang="nl-NL" smtClean="0"/>
-              <a:t>30-03-25</a:t>
+              <a:t>02-04-25</a:t>
             </a:fld>
             <a:endParaRPr lang="nl-NL"/>
           </a:p>
@@ -487,7 +487,7 @@
           <a:p>
             <a:fld id="{FF881B2C-DF78-4307-9E03-918864251AC5}" type="datetimeFigureOut">
               <a:rPr lang="nl-NL" smtClean="0"/>
-              <a:t>30-03-25</a:t>
+              <a:t>02-04-25</a:t>
             </a:fld>
             <a:endParaRPr lang="nl-NL"/>
           </a:p>
@@ -697,7 +697,7 @@
           <a:p>
             <a:fld id="{FF881B2C-DF78-4307-9E03-918864251AC5}" type="datetimeFigureOut">
               <a:rPr lang="nl-NL" smtClean="0"/>
-              <a:t>30-03-25</a:t>
+              <a:t>02-04-25</a:t>
             </a:fld>
             <a:endParaRPr lang="nl-NL"/>
           </a:p>
@@ -897,7 +897,7 @@
           <a:p>
             <a:fld id="{FF881B2C-DF78-4307-9E03-918864251AC5}" type="datetimeFigureOut">
               <a:rPr lang="nl-NL" smtClean="0"/>
-              <a:t>30-03-25</a:t>
+              <a:t>02-04-25</a:t>
             </a:fld>
             <a:endParaRPr lang="nl-NL"/>
           </a:p>
@@ -1173,7 +1173,7 @@
           <a:p>
             <a:fld id="{FF881B2C-DF78-4307-9E03-918864251AC5}" type="datetimeFigureOut">
               <a:rPr lang="nl-NL" smtClean="0"/>
-              <a:t>30-03-25</a:t>
+              <a:t>02-04-25</a:t>
             </a:fld>
             <a:endParaRPr lang="nl-NL"/>
           </a:p>
@@ -1441,7 +1441,7 @@
           <a:p>
             <a:fld id="{FF881B2C-DF78-4307-9E03-918864251AC5}" type="datetimeFigureOut">
               <a:rPr lang="nl-NL" smtClean="0"/>
-              <a:t>30-03-25</a:t>
+              <a:t>02-04-25</a:t>
             </a:fld>
             <a:endParaRPr lang="nl-NL"/>
           </a:p>
@@ -1856,7 +1856,7 @@
           <a:p>
             <a:fld id="{FF881B2C-DF78-4307-9E03-918864251AC5}" type="datetimeFigureOut">
               <a:rPr lang="nl-NL" smtClean="0"/>
-              <a:t>30-03-25</a:t>
+              <a:t>02-04-25</a:t>
             </a:fld>
             <a:endParaRPr lang="nl-NL"/>
           </a:p>
@@ -1998,7 +1998,7 @@
           <a:p>
             <a:fld id="{FF881B2C-DF78-4307-9E03-918864251AC5}" type="datetimeFigureOut">
               <a:rPr lang="nl-NL" smtClean="0"/>
-              <a:t>30-03-25</a:t>
+              <a:t>02-04-25</a:t>
             </a:fld>
             <a:endParaRPr lang="nl-NL"/>
           </a:p>
@@ -2111,7 +2111,7 @@
           <a:p>
             <a:fld id="{FF881B2C-DF78-4307-9E03-918864251AC5}" type="datetimeFigureOut">
               <a:rPr lang="nl-NL" smtClean="0"/>
-              <a:t>30-03-25</a:t>
+              <a:t>02-04-25</a:t>
             </a:fld>
             <a:endParaRPr lang="nl-NL"/>
           </a:p>
@@ -2424,7 +2424,7 @@
           <a:p>
             <a:fld id="{FF881B2C-DF78-4307-9E03-918864251AC5}" type="datetimeFigureOut">
               <a:rPr lang="nl-NL" smtClean="0"/>
-              <a:t>30-03-25</a:t>
+              <a:t>02-04-25</a:t>
             </a:fld>
             <a:endParaRPr lang="nl-NL"/>
           </a:p>
@@ -2713,7 +2713,7 @@
           <a:p>
             <a:fld id="{FF881B2C-DF78-4307-9E03-918864251AC5}" type="datetimeFigureOut">
               <a:rPr lang="nl-NL" smtClean="0"/>
-              <a:t>30-03-25</a:t>
+              <a:t>02-04-25</a:t>
             </a:fld>
             <a:endParaRPr lang="nl-NL"/>
           </a:p>
@@ -2956,7 +2956,7 @@
           <a:p>
             <a:fld id="{FF881B2C-DF78-4307-9E03-918864251AC5}" type="datetimeFigureOut">
               <a:rPr lang="nl-NL" smtClean="0"/>
-              <a:t>30-03-25</a:t>
+              <a:t>02-04-25</a:t>
             </a:fld>
             <a:endParaRPr lang="nl-NL"/>
           </a:p>
@@ -3753,7 +3753,7 @@
           <a:p>
             <a:fld id="{63A1C593-65D0-4073-BCC9-577B9352EA97}" type="datetime1">
               <a:rPr lang="en-US" smtClean="0"/>
-              <a:t>3/30/2025</a:t>
+              <a:t>4/2/2025</a:t>
             </a:fld>
             <a:endParaRPr lang="en-US"/>
           </a:p>
@@ -4071,7 +4071,7 @@
           <a:p>
             <a:fld id="{63A1C593-65D0-4073-BCC9-577B9352EA97}" type="datetime1">
               <a:rPr lang="en-US" smtClean="0"/>
-              <a:t>3/30/2025</a:t>
+              <a:t>4/2/2025</a:t>
             </a:fld>
             <a:endParaRPr lang="en-US"/>
           </a:p>
@@ -4416,7 +4416,7 @@
           <a:p>
             <a:fld id="{63A1C593-65D0-4073-BCC9-577B9352EA97}" type="datetime1">
               <a:rPr lang="en-US" smtClean="0"/>
-              <a:t>3/30/2025</a:t>
+              <a:t>4/2/2025</a:t>
             </a:fld>
             <a:endParaRPr lang="en-US"/>
           </a:p>
@@ -4871,6 +4871,154 @@
           <p:cNvPr id="2" name="Title 1">
             <a:extLst>
               <a:ext uri="{FF2B5EF4-FFF2-40B4-BE49-F238E27FC236}">
+                <a16:creationId xmlns:a16="http://schemas.microsoft.com/office/drawing/2014/main" id="{91916ED6-B3A3-23A2-31E1-EB811A5A9B44}"/>
+              </a:ext>
+            </a:extLst>
+          </p:cNvPr>
+          <p:cNvSpPr>
+            <a:spLocks noGrp="1"/>
+          </p:cNvSpPr>
+          <p:nvPr>
+            <p:ph type="title"/>
+          </p:nvPr>
+        </p:nvSpPr>
+        <p:spPr>
+          <a:xfrm>
+            <a:off x="767178" y="880030"/>
+            <a:ext cx="10515600" cy="1325563"/>
+          </a:xfrm>
+        </p:spPr>
+        <p:txBody>
+          <a:bodyPr/>
+          <a:lstStyle/>
+          <a:p>
+            <a:r>
+              <a:rPr lang="en-US" dirty="0"/>
+              <a:t>Course outline</a:t>
+            </a:r>
+            <a:endParaRPr lang="nl-NL" dirty="0"/>
+          </a:p>
+        </p:txBody>
+      </p:sp>
+      <p:sp>
+        <p:nvSpPr>
+          <p:cNvPr id="3" name="Content Placeholder 2">
+            <a:extLst>
+              <a:ext uri="{FF2B5EF4-FFF2-40B4-BE49-F238E27FC236}">
+                <a16:creationId xmlns:a16="http://schemas.microsoft.com/office/drawing/2014/main" id="{3F1A3350-7497-9AB3-58CC-514DE524C260}"/>
+              </a:ext>
+            </a:extLst>
+          </p:cNvPr>
+          <p:cNvSpPr>
+            <a:spLocks noGrp="1"/>
+          </p:cNvSpPr>
+          <p:nvPr>
+            <p:ph idx="1"/>
+          </p:nvPr>
+        </p:nvSpPr>
+        <p:spPr>
+          <a:xfrm>
+            <a:off x="767178" y="2340530"/>
+            <a:ext cx="10515600" cy="4351338"/>
+          </a:xfrm>
+        </p:spPr>
+        <p:txBody>
+          <a:bodyPr/>
+          <a:lstStyle/>
+          <a:p>
+            <a:r>
+              <a:rPr lang="en-US" dirty="0"/>
+              <a:t>Working in groups when possible – help </a:t>
+            </a:r>
+            <a:r>
+              <a:rPr lang="en-US" dirty="0" err="1"/>
+              <a:t>eachother</a:t>
+            </a:r>
+            <a:endParaRPr lang="en-US" dirty="0"/>
+          </a:p>
+          <a:p>
+            <a:r>
+              <a:rPr lang="en-US" dirty="0"/>
+              <a:t>Web browser needed (Chrome, Edge, Firefox, </a:t>
+            </a:r>
+            <a:r>
+              <a:rPr lang="en-US" dirty="0" err="1"/>
+              <a:t>etc</a:t>
+            </a:r>
+            <a:r>
+              <a:rPr lang="en-US" dirty="0"/>
+              <a:t>)</a:t>
+            </a:r>
+          </a:p>
+          <a:p>
+            <a:r>
+              <a:rPr lang="en-US" dirty="0">
+                <a:hlinkClick r:id="rId2"/>
+              </a:rPr>
+              <a:t>https://klif.uu.nl:8080/</a:t>
+            </a:r>
+            <a:endParaRPr lang="en-US" dirty="0"/>
+          </a:p>
+          <a:p>
+            <a:endParaRPr lang="en-US" dirty="0"/>
+          </a:p>
+          <a:p>
+            <a:r>
+              <a:rPr lang="en-US" dirty="0"/>
+              <a:t>Login using username and password given in </a:t>
+            </a:r>
+            <a:r>
+              <a:rPr lang="en-US"/>
+              <a:t>the chat</a:t>
+            </a:r>
+            <a:endParaRPr lang="en-US" dirty="0"/>
+          </a:p>
+          <a:p>
+            <a:endParaRPr lang="en-US" dirty="0"/>
+          </a:p>
+          <a:p>
+            <a:pPr marL="0" indent="0">
+              <a:buNone/>
+            </a:pPr>
+            <a:endParaRPr lang="nl-NL" dirty="0"/>
+          </a:p>
+        </p:txBody>
+      </p:sp>
+    </p:spTree>
+    <p:extLst>
+      <p:ext uri="{BB962C8B-B14F-4D97-AF65-F5344CB8AC3E}">
+        <p14:creationId xmlns:p14="http://schemas.microsoft.com/office/powerpoint/2010/main" val="798679496"/>
+      </p:ext>
+    </p:extLst>
+  </p:cSld>
+  <p:clrMapOvr>
+    <a:masterClrMapping/>
+  </p:clrMapOvr>
+</p:sld>
+</file>
+
+<file path=ppt/slides/slide14.xml><?xml version="1.0" encoding="utf-8"?>
+<p:sld xmlns:a="http://schemas.openxmlformats.org/drawingml/2006/main" xmlns:r="http://schemas.openxmlformats.org/officeDocument/2006/relationships" xmlns:p="http://schemas.openxmlformats.org/presentationml/2006/main">
+  <p:cSld>
+    <p:spTree>
+      <p:nvGrpSpPr>
+        <p:cNvPr id="1" name=""/>
+        <p:cNvGrpSpPr/>
+        <p:nvPr/>
+      </p:nvGrpSpPr>
+      <p:grpSpPr>
+        <a:xfrm>
+          <a:off x="0" y="0"/>
+          <a:ext cx="0" cy="0"/>
+          <a:chOff x="0" y="0"/>
+          <a:chExt cx="0" cy="0"/>
+        </a:xfrm>
+      </p:grpSpPr>
+      <p:sp>
+        <p:nvSpPr>
+          <p:cNvPr id="2" name="Title 1">
+            <a:extLst>
+              <a:ext uri="{FF2B5EF4-FFF2-40B4-BE49-F238E27FC236}">
                 <a16:creationId xmlns:a16="http://schemas.microsoft.com/office/drawing/2014/main" id="{31DDE783-254C-16D9-0583-351291068658}"/>
               </a:ext>
             </a:extLst>
@@ -4946,7 +5094,7 @@
 </p:sld>
 </file>
 
-<file path=ppt/slides/slide14.xml><?xml version="1.0" encoding="utf-8"?>
+<file path=ppt/slides/slide15.xml><?xml version="1.0" encoding="utf-8"?>
 <p:sld xmlns:a="http://schemas.openxmlformats.org/drawingml/2006/main" xmlns:r="http://schemas.openxmlformats.org/officeDocument/2006/relationships" xmlns:p="http://schemas.openxmlformats.org/presentationml/2006/main">
   <p:cSld>
     <p:spTree>
@@ -5074,7 +5222,7 @@
 </p:sld>
 </file>
 
-<file path=ppt/slides/slide15.xml><?xml version="1.0" encoding="utf-8"?>
+<file path=ppt/slides/slide16.xml><?xml version="1.0" encoding="utf-8"?>
 <p:sld xmlns:a="http://schemas.openxmlformats.org/drawingml/2006/main" xmlns:r="http://schemas.openxmlformats.org/officeDocument/2006/relationships" xmlns:p="http://schemas.openxmlformats.org/presentationml/2006/main">
   <p:cSld>
     <p:spTree>
@@ -6024,7 +6172,7 @@
 </p:sld>
 </file>
 
-<file path=ppt/slides/slide16.xml><?xml version="1.0" encoding="utf-8"?>
+<file path=ppt/slides/slide17.xml><?xml version="1.0" encoding="utf-8"?>
 <p:sld xmlns:a="http://schemas.openxmlformats.org/drawingml/2006/main" xmlns:r="http://schemas.openxmlformats.org/officeDocument/2006/relationships" xmlns:p="http://schemas.openxmlformats.org/presentationml/2006/main">
   <p:cSld>
     <p:spTree>
@@ -6233,7 +6381,7 @@
 </p:sld>
 </file>
 
-<file path=ppt/slides/slide17.xml><?xml version="1.0" encoding="utf-8"?>
+<file path=ppt/slides/slide18.xml><?xml version="1.0" encoding="utf-8"?>
 <p:sld xmlns:a="http://schemas.openxmlformats.org/drawingml/2006/main" xmlns:r="http://schemas.openxmlformats.org/officeDocument/2006/relationships" xmlns:p="http://schemas.openxmlformats.org/presentationml/2006/main">
   <p:cSld>
     <p:spTree>
@@ -6373,7 +6521,7 @@
 </p:sld>
 </file>
 
-<file path=ppt/slides/slide18.xml><?xml version="1.0" encoding="utf-8"?>
+<file path=ppt/slides/slide19.xml><?xml version="1.0" encoding="utf-8"?>
 <p:sld xmlns:a="http://schemas.openxmlformats.org/drawingml/2006/main" xmlns:r="http://schemas.openxmlformats.org/officeDocument/2006/relationships" xmlns:p="http://schemas.openxmlformats.org/presentationml/2006/main">
   <p:cSld>
     <p:spTree>
@@ -6509,150 +6657,6 @@
     <p:extLst>
       <p:ext uri="{BB962C8B-B14F-4D97-AF65-F5344CB8AC3E}">
         <p14:creationId xmlns:p14="http://schemas.microsoft.com/office/powerpoint/2010/main" val="2178576488"/>
-      </p:ext>
-    </p:extLst>
-  </p:cSld>
-  <p:clrMapOvr>
-    <a:masterClrMapping/>
-  </p:clrMapOvr>
-</p:sld>
-</file>
-
-<file path=ppt/slides/slide19.xml><?xml version="1.0" encoding="utf-8"?>
-<p:sld xmlns:a="http://schemas.openxmlformats.org/drawingml/2006/main" xmlns:r="http://schemas.openxmlformats.org/officeDocument/2006/relationships" xmlns:p="http://schemas.openxmlformats.org/presentationml/2006/main">
-  <p:cSld>
-    <p:spTree>
-      <p:nvGrpSpPr>
-        <p:cNvPr id="1" name=""/>
-        <p:cNvGrpSpPr/>
-        <p:nvPr/>
-      </p:nvGrpSpPr>
-      <p:grpSpPr>
-        <a:xfrm>
-          <a:off x="0" y="0"/>
-          <a:ext cx="0" cy="0"/>
-          <a:chOff x="0" y="0"/>
-          <a:chExt cx="0" cy="0"/>
-        </a:xfrm>
-      </p:grpSpPr>
-      <p:sp>
-        <p:nvSpPr>
-          <p:cNvPr id="2" name="Title 1">
-            <a:extLst>
-              <a:ext uri="{FF2B5EF4-FFF2-40B4-BE49-F238E27FC236}">
-                <a16:creationId xmlns:a16="http://schemas.microsoft.com/office/drawing/2014/main" id="{499BA949-2D26-93B2-E734-830D0B5392A7}"/>
-              </a:ext>
-            </a:extLst>
-          </p:cNvPr>
-          <p:cNvSpPr>
-            <a:spLocks noGrp="1"/>
-          </p:cNvSpPr>
-          <p:nvPr>
-            <p:ph type="title"/>
-          </p:nvPr>
-        </p:nvSpPr>
-        <p:spPr>
-          <a:xfrm>
-            <a:off x="838200" y="1510346"/>
-            <a:ext cx="10515600" cy="1325563"/>
-          </a:xfrm>
-        </p:spPr>
-        <p:txBody>
-          <a:bodyPr/>
-          <a:lstStyle/>
-          <a:p>
-            <a:r>
-              <a:rPr lang="en-US" dirty="0"/>
-              <a:t>“wildcards”</a:t>
-            </a:r>
-            <a:endParaRPr lang="nl-NL" dirty="0"/>
-          </a:p>
-        </p:txBody>
-      </p:sp>
-      <p:sp>
-        <p:nvSpPr>
-          <p:cNvPr id="3" name="Content Placeholder 2">
-            <a:extLst>
-              <a:ext uri="{FF2B5EF4-FFF2-40B4-BE49-F238E27FC236}">
-                <a16:creationId xmlns:a16="http://schemas.microsoft.com/office/drawing/2014/main" id="{70B6FB1F-C91B-EFDC-8A20-8ECD06D6C380}"/>
-              </a:ext>
-            </a:extLst>
-          </p:cNvPr>
-          <p:cNvSpPr>
-            <a:spLocks noGrp="1"/>
-          </p:cNvSpPr>
-          <p:nvPr>
-            <p:ph idx="1"/>
-          </p:nvPr>
-        </p:nvSpPr>
-        <p:spPr>
-          <a:xfrm>
-            <a:off x="838200" y="2970846"/>
-            <a:ext cx="10515600" cy="4351338"/>
-          </a:xfrm>
-        </p:spPr>
-        <p:txBody>
-          <a:bodyPr/>
-          <a:lstStyle/>
-          <a:p>
-            <a:r>
-              <a:rPr lang="en-US" dirty="0"/>
-              <a:t>ls *.</a:t>
-            </a:r>
-            <a:r>
-              <a:rPr lang="en-US" dirty="0" err="1"/>
-              <a:t>fasta</a:t>
-            </a:r>
-            <a:r>
-              <a:rPr lang="en-US" dirty="0"/>
-              <a:t>		# lists all files matching .</a:t>
-            </a:r>
-            <a:r>
-              <a:rPr lang="en-US" dirty="0" err="1"/>
-              <a:t>fasta</a:t>
-            </a:r>
-            <a:r>
-              <a:rPr lang="en-US" dirty="0"/>
-              <a:t> . The * is a wildcard </a:t>
-            </a:r>
-            <a:endParaRPr lang="nl-NL" dirty="0"/>
-          </a:p>
-        </p:txBody>
-      </p:sp>
-      <p:pic>
-        <p:nvPicPr>
-          <p:cNvPr id="5" name="Picture 4">
-            <a:extLst>
-              <a:ext uri="{FF2B5EF4-FFF2-40B4-BE49-F238E27FC236}">
-                <a16:creationId xmlns:a16="http://schemas.microsoft.com/office/drawing/2014/main" id="{DF94163A-8402-A909-53F0-FF5CC6AB5350}"/>
-              </a:ext>
-            </a:extLst>
-          </p:cNvPr>
-          <p:cNvPicPr>
-            <a:picLocks noChangeAspect="1"/>
-          </p:cNvPicPr>
-          <p:nvPr/>
-        </p:nvPicPr>
-        <p:blipFill>
-          <a:blip r:embed="rId2"/>
-          <a:stretch>
-            <a:fillRect/>
-          </a:stretch>
-        </p:blipFill>
-        <p:spPr>
-          <a:xfrm>
-            <a:off x="-69347" y="3928376"/>
-            <a:ext cx="12330693" cy="1487004"/>
-          </a:xfrm>
-          <a:prstGeom prst="rect">
-            <a:avLst/>
-          </a:prstGeom>
-        </p:spPr>
-      </p:pic>
-    </p:spTree>
-    <p:extLst>
-      <p:ext uri="{BB962C8B-B14F-4D97-AF65-F5344CB8AC3E}">
-        <p14:creationId xmlns:p14="http://schemas.microsoft.com/office/powerpoint/2010/main" val="4025548366"/>
       </p:ext>
     </p:extLst>
   </p:cSld>
@@ -6860,6 +6864,150 @@
           <p:cNvPr id="2" name="Title 1">
             <a:extLst>
               <a:ext uri="{FF2B5EF4-FFF2-40B4-BE49-F238E27FC236}">
+                <a16:creationId xmlns:a16="http://schemas.microsoft.com/office/drawing/2014/main" id="{499BA949-2D26-93B2-E734-830D0B5392A7}"/>
+              </a:ext>
+            </a:extLst>
+          </p:cNvPr>
+          <p:cNvSpPr>
+            <a:spLocks noGrp="1"/>
+          </p:cNvSpPr>
+          <p:nvPr>
+            <p:ph type="title"/>
+          </p:nvPr>
+        </p:nvSpPr>
+        <p:spPr>
+          <a:xfrm>
+            <a:off x="838200" y="1510346"/>
+            <a:ext cx="10515600" cy="1325563"/>
+          </a:xfrm>
+        </p:spPr>
+        <p:txBody>
+          <a:bodyPr/>
+          <a:lstStyle/>
+          <a:p>
+            <a:r>
+              <a:rPr lang="en-US" dirty="0"/>
+              <a:t>“wildcards”</a:t>
+            </a:r>
+            <a:endParaRPr lang="nl-NL" dirty="0"/>
+          </a:p>
+        </p:txBody>
+      </p:sp>
+      <p:sp>
+        <p:nvSpPr>
+          <p:cNvPr id="3" name="Content Placeholder 2">
+            <a:extLst>
+              <a:ext uri="{FF2B5EF4-FFF2-40B4-BE49-F238E27FC236}">
+                <a16:creationId xmlns:a16="http://schemas.microsoft.com/office/drawing/2014/main" id="{70B6FB1F-C91B-EFDC-8A20-8ECD06D6C380}"/>
+              </a:ext>
+            </a:extLst>
+          </p:cNvPr>
+          <p:cNvSpPr>
+            <a:spLocks noGrp="1"/>
+          </p:cNvSpPr>
+          <p:nvPr>
+            <p:ph idx="1"/>
+          </p:nvPr>
+        </p:nvSpPr>
+        <p:spPr>
+          <a:xfrm>
+            <a:off x="838200" y="2970846"/>
+            <a:ext cx="10515600" cy="4351338"/>
+          </a:xfrm>
+        </p:spPr>
+        <p:txBody>
+          <a:bodyPr/>
+          <a:lstStyle/>
+          <a:p>
+            <a:r>
+              <a:rPr lang="en-US" dirty="0"/>
+              <a:t>ls *.</a:t>
+            </a:r>
+            <a:r>
+              <a:rPr lang="en-US" dirty="0" err="1"/>
+              <a:t>fasta</a:t>
+            </a:r>
+            <a:r>
+              <a:rPr lang="en-US" dirty="0"/>
+              <a:t>		# lists all files matching .</a:t>
+            </a:r>
+            <a:r>
+              <a:rPr lang="en-US" dirty="0" err="1"/>
+              <a:t>fasta</a:t>
+            </a:r>
+            <a:r>
+              <a:rPr lang="en-US" dirty="0"/>
+              <a:t> . The * is a wildcard </a:t>
+            </a:r>
+            <a:endParaRPr lang="nl-NL" dirty="0"/>
+          </a:p>
+        </p:txBody>
+      </p:sp>
+      <p:pic>
+        <p:nvPicPr>
+          <p:cNvPr id="5" name="Picture 4">
+            <a:extLst>
+              <a:ext uri="{FF2B5EF4-FFF2-40B4-BE49-F238E27FC236}">
+                <a16:creationId xmlns:a16="http://schemas.microsoft.com/office/drawing/2014/main" id="{DF94163A-8402-A909-53F0-FF5CC6AB5350}"/>
+              </a:ext>
+            </a:extLst>
+          </p:cNvPr>
+          <p:cNvPicPr>
+            <a:picLocks noChangeAspect="1"/>
+          </p:cNvPicPr>
+          <p:nvPr/>
+        </p:nvPicPr>
+        <p:blipFill>
+          <a:blip r:embed="rId2"/>
+          <a:stretch>
+            <a:fillRect/>
+          </a:stretch>
+        </p:blipFill>
+        <p:spPr>
+          <a:xfrm>
+            <a:off x="-69347" y="3928376"/>
+            <a:ext cx="12330693" cy="1487004"/>
+          </a:xfrm>
+          <a:prstGeom prst="rect">
+            <a:avLst/>
+          </a:prstGeom>
+        </p:spPr>
+      </p:pic>
+    </p:spTree>
+    <p:extLst>
+      <p:ext uri="{BB962C8B-B14F-4D97-AF65-F5344CB8AC3E}">
+        <p14:creationId xmlns:p14="http://schemas.microsoft.com/office/powerpoint/2010/main" val="4025548366"/>
+      </p:ext>
+    </p:extLst>
+  </p:cSld>
+  <p:clrMapOvr>
+    <a:masterClrMapping/>
+  </p:clrMapOvr>
+</p:sld>
+</file>
+
+<file path=ppt/slides/slide21.xml><?xml version="1.0" encoding="utf-8"?>
+<p:sld xmlns:a="http://schemas.openxmlformats.org/drawingml/2006/main" xmlns:r="http://schemas.openxmlformats.org/officeDocument/2006/relationships" xmlns:p="http://schemas.openxmlformats.org/presentationml/2006/main">
+  <p:cSld>
+    <p:spTree>
+      <p:nvGrpSpPr>
+        <p:cNvPr id="1" name=""/>
+        <p:cNvGrpSpPr/>
+        <p:nvPr/>
+      </p:nvGrpSpPr>
+      <p:grpSpPr>
+        <a:xfrm>
+          <a:off x="0" y="0"/>
+          <a:ext cx="0" cy="0"/>
+          <a:chOff x="0" y="0"/>
+          <a:chExt cx="0" cy="0"/>
+        </a:xfrm>
+      </p:grpSpPr>
+      <p:sp>
+        <p:nvSpPr>
+          <p:cNvPr id="2" name="Title 1">
+            <a:extLst>
+              <a:ext uri="{FF2B5EF4-FFF2-40B4-BE49-F238E27FC236}">
                 <a16:creationId xmlns:a16="http://schemas.microsoft.com/office/drawing/2014/main" id="{31DDE783-254C-16D9-0583-351291068658}"/>
               </a:ext>
             </a:extLst>
@@ -6977,7 +7125,7 @@
 </p:sld>
 </file>
 
-<file path=ppt/slides/slide21.xml><?xml version="1.0" encoding="utf-8"?>
+<file path=ppt/slides/slide22.xml><?xml version="1.0" encoding="utf-8"?>
 <p:sld xmlns:a="http://schemas.openxmlformats.org/drawingml/2006/main" xmlns:r="http://schemas.openxmlformats.org/officeDocument/2006/relationships" xmlns:p="http://schemas.openxmlformats.org/presentationml/2006/main">
   <p:cSld>
     <p:spTree>
@@ -7159,7 +7307,7 @@
 </p:sld>
 </file>
 
-<file path=ppt/slides/slide22.xml><?xml version="1.0" encoding="utf-8"?>
+<file path=ppt/slides/slide23.xml><?xml version="1.0" encoding="utf-8"?>
 <p:sld xmlns:a="http://schemas.openxmlformats.org/drawingml/2006/main" xmlns:r="http://schemas.openxmlformats.org/officeDocument/2006/relationships" xmlns:p="http://schemas.openxmlformats.org/presentationml/2006/main">
   <p:cSld>
     <p:spTree>
@@ -8077,7 +8225,7 @@
 </p:sld>
 </file>
 
-<file path=ppt/slides/slide23.xml><?xml version="1.0" encoding="utf-8"?>
+<file path=ppt/slides/slide24.xml><?xml version="1.0" encoding="utf-8"?>
 <p:sld xmlns:a="http://schemas.openxmlformats.org/drawingml/2006/main" xmlns:r="http://schemas.openxmlformats.org/officeDocument/2006/relationships" xmlns:p="http://schemas.openxmlformats.org/presentationml/2006/main">
   <p:cSld>
     <p:spTree>
@@ -8644,7 +8792,7 @@
 </p:sld>
 </file>
 
-<file path=ppt/slides/slide24.xml><?xml version="1.0" encoding="utf-8"?>
+<file path=ppt/slides/slide25.xml><?xml version="1.0" encoding="utf-8"?>
 <p:sld xmlns:a="http://schemas.openxmlformats.org/drawingml/2006/main" xmlns:r="http://schemas.openxmlformats.org/officeDocument/2006/relationships" xmlns:p="http://schemas.openxmlformats.org/presentationml/2006/main">
   <p:cSld>
     <p:spTree>
@@ -8750,7 +8898,7 @@
 </p:sld>
 </file>
 
-<file path=ppt/slides/slide25.xml><?xml version="1.0" encoding="utf-8"?>
+<file path=ppt/slides/slide26.xml><?xml version="1.0" encoding="utf-8"?>
 <p:sld xmlns:a="http://schemas.openxmlformats.org/drawingml/2006/main" xmlns:r="http://schemas.openxmlformats.org/officeDocument/2006/relationships" xmlns:p="http://schemas.openxmlformats.org/presentationml/2006/main">
   <p:cSld>
     <p:spTree>
@@ -8978,164 +9126,6 @@
     <p:extLst>
       <p:ext uri="{BB962C8B-B14F-4D97-AF65-F5344CB8AC3E}">
         <p14:creationId xmlns:p14="http://schemas.microsoft.com/office/powerpoint/2010/main" val="169579582"/>
-      </p:ext>
-    </p:extLst>
-  </p:cSld>
-  <p:clrMapOvr>
-    <a:masterClrMapping/>
-  </p:clrMapOvr>
-</p:sld>
-</file>
-
-<file path=ppt/slides/slide26.xml><?xml version="1.0" encoding="utf-8"?>
-<p:sld xmlns:a="http://schemas.openxmlformats.org/drawingml/2006/main" xmlns:r="http://schemas.openxmlformats.org/officeDocument/2006/relationships" xmlns:p="http://schemas.openxmlformats.org/presentationml/2006/main">
-  <p:cSld>
-    <p:spTree>
-      <p:nvGrpSpPr>
-        <p:cNvPr id="1" name=""/>
-        <p:cNvGrpSpPr/>
-        <p:nvPr/>
-      </p:nvGrpSpPr>
-      <p:grpSpPr>
-        <a:xfrm>
-          <a:off x="0" y="0"/>
-          <a:ext cx="0" cy="0"/>
-          <a:chOff x="0" y="0"/>
-          <a:chExt cx="0" cy="0"/>
-        </a:xfrm>
-      </p:grpSpPr>
-      <p:sp>
-        <p:nvSpPr>
-          <p:cNvPr id="2" name="Title 1">
-            <a:extLst>
-              <a:ext uri="{FF2B5EF4-FFF2-40B4-BE49-F238E27FC236}">
-                <a16:creationId xmlns:a16="http://schemas.microsoft.com/office/drawing/2014/main" id="{91916ED6-B3A3-23A2-31E1-EB811A5A9B44}"/>
-              </a:ext>
-            </a:extLst>
-          </p:cNvPr>
-          <p:cNvSpPr>
-            <a:spLocks noGrp="1"/>
-          </p:cNvSpPr>
-          <p:nvPr>
-            <p:ph type="title"/>
-          </p:nvPr>
-        </p:nvSpPr>
-        <p:spPr>
-          <a:xfrm>
-            <a:off x="767178" y="880030"/>
-            <a:ext cx="10515600" cy="1325563"/>
-          </a:xfrm>
-        </p:spPr>
-        <p:txBody>
-          <a:bodyPr/>
-          <a:lstStyle/>
-          <a:p>
-            <a:r>
-              <a:rPr lang="en-US" dirty="0"/>
-              <a:t>Course outline</a:t>
-            </a:r>
-            <a:endParaRPr lang="nl-NL" dirty="0"/>
-          </a:p>
-        </p:txBody>
-      </p:sp>
-      <p:sp>
-        <p:nvSpPr>
-          <p:cNvPr id="3" name="Content Placeholder 2">
-            <a:extLst>
-              <a:ext uri="{FF2B5EF4-FFF2-40B4-BE49-F238E27FC236}">
-                <a16:creationId xmlns:a16="http://schemas.microsoft.com/office/drawing/2014/main" id="{3F1A3350-7497-9AB3-58CC-514DE524C260}"/>
-              </a:ext>
-            </a:extLst>
-          </p:cNvPr>
-          <p:cNvSpPr>
-            <a:spLocks noGrp="1"/>
-          </p:cNvSpPr>
-          <p:nvPr>
-            <p:ph idx="1"/>
-          </p:nvPr>
-        </p:nvSpPr>
-        <p:spPr>
-          <a:xfrm>
-            <a:off x="767178" y="2340530"/>
-            <a:ext cx="10515600" cy="4351338"/>
-          </a:xfrm>
-        </p:spPr>
-        <p:txBody>
-          <a:bodyPr/>
-          <a:lstStyle/>
-          <a:p>
-            <a:r>
-              <a:rPr lang="en-US" dirty="0"/>
-              <a:t>Working in groups when possible – help </a:t>
-            </a:r>
-            <a:r>
-              <a:rPr lang="en-US" dirty="0" err="1"/>
-              <a:t>eachother</a:t>
-            </a:r>
-            <a:endParaRPr lang="en-US" dirty="0"/>
-          </a:p>
-          <a:p>
-            <a:r>
-              <a:rPr lang="en-US" dirty="0"/>
-              <a:t>Web browser needed (Chrome, Edge, Firefox, </a:t>
-            </a:r>
-            <a:r>
-              <a:rPr lang="en-US" dirty="0" err="1"/>
-              <a:t>etc</a:t>
-            </a:r>
-            <a:r>
-              <a:rPr lang="en-US" dirty="0"/>
-              <a:t>)</a:t>
-            </a:r>
-          </a:p>
-          <a:p>
-            <a:r>
-              <a:rPr lang="en-US" dirty="0">
-                <a:hlinkClick r:id="rId2"/>
-              </a:rPr>
-              <a:t>https://klif.uu.nl:8080/</a:t>
-            </a:r>
-            <a:endParaRPr lang="en-US" dirty="0"/>
-          </a:p>
-          <a:p>
-            <a:endParaRPr lang="en-US" dirty="0"/>
-          </a:p>
-          <a:p>
-            <a:pPr marL="0" indent="0">
-              <a:buNone/>
-            </a:pPr>
-            <a:r>
-              <a:rPr lang="en-US" dirty="0"/>
-              <a:t>Dataset:</a:t>
-            </a:r>
-          </a:p>
-          <a:p>
-            <a:r>
-              <a:rPr lang="en-US" dirty="0"/>
-              <a:t>35 E. coli isolates</a:t>
-            </a:r>
-          </a:p>
-          <a:p>
-            <a:r>
-              <a:rPr lang="en-US" dirty="0"/>
-              <a:t>Carbapenemase resistant or sensitive</a:t>
-            </a:r>
-          </a:p>
-          <a:p>
-            <a:r>
-              <a:rPr lang="en-US" dirty="0"/>
-              <a:t>Nanopore sequenced at UU</a:t>
-            </a:r>
-          </a:p>
-          <a:p>
-            <a:endParaRPr lang="nl-NL" dirty="0"/>
-          </a:p>
-        </p:txBody>
-      </p:sp>
-    </p:spTree>
-    <p:extLst>
-      <p:ext uri="{BB962C8B-B14F-4D97-AF65-F5344CB8AC3E}">
-        <p14:creationId xmlns:p14="http://schemas.microsoft.com/office/powerpoint/2010/main" val="653873239"/>
       </p:ext>
     </p:extLst>
   </p:cSld>
@@ -9763,7 +9753,7 @@
           <a:p>
             <a:fld id="{63A1C593-65D0-4073-BCC9-577B9352EA97}" type="datetime1">
               <a:rPr lang="en-US" smtClean="0"/>
-              <a:t>3/30/2025</a:t>
+              <a:t>4/2/2025</a:t>
             </a:fld>
             <a:endParaRPr lang="en-US"/>
           </a:p>
@@ -10114,7 +10104,7 @@
           <a:p>
             <a:fld id="{63A1C593-65D0-4073-BCC9-577B9352EA97}" type="datetime1">
               <a:rPr lang="en-US" smtClean="0"/>
-              <a:t>3/30/2025</a:t>
+              <a:t>4/2/2025</a:t>
             </a:fld>
             <a:endParaRPr lang="en-US"/>
           </a:p>
@@ -12150,7 +12140,7 @@
           <a:p>
             <a:fld id="{63A1C593-65D0-4073-BCC9-577B9352EA97}" type="datetime1">
               <a:rPr lang="en-US" smtClean="0"/>
-              <a:t>3/30/2025</a:t>
+              <a:t>4/2/2025</a:t>
             </a:fld>
             <a:endParaRPr lang="en-US"/>
           </a:p>
